--- a/Project1/Projeto 1 - Teoria da Estimação.pptx
+++ b/Project1/Projeto 1 - Teoria da Estimação.pptx
@@ -32161,8 +32161,8 @@
           </a:p>
         </p:txBody>
       </p:sp>
-      <mc:AlternateContent xmlns:mc="http://schemas.openxmlformats.org/markup-compatibility/2006">
-        <mc:Choice xmlns:a14="http://schemas.microsoft.com/office/drawing/2010/main" Requires="a14">
+      <mc:AlternateContent xmlns:mc="http://schemas.openxmlformats.org/markup-compatibility/2006" xmlns:a14="http://schemas.microsoft.com/office/drawing/2010/main">
+        <mc:Choice Requires="a14">
           <p:sp>
             <p:nvSpPr>
               <p:cNvPr id="321" name="Google Shape;321;p36">
@@ -33114,7 +33114,7 @@
             </p:txBody>
           </p:sp>
         </mc:Choice>
-        <mc:Fallback>
+        <mc:Fallback xmlns="">
           <p:sp>
             <p:nvSpPr>
               <p:cNvPr id="321" name="Google Shape;321;p36">
@@ -33219,13 +33219,13 @@
   <p:clrMapOvr>
     <a:masterClrMapping/>
   </p:clrMapOvr>
-  <mc:AlternateContent xmlns:mc="http://schemas.openxmlformats.org/markup-compatibility/2006">
-    <mc:Choice xmlns:p14="http://schemas.microsoft.com/office/powerpoint/2010/main" Requires="p14">
+  <mc:AlternateContent xmlns:mc="http://schemas.openxmlformats.org/markup-compatibility/2006" xmlns:p14="http://schemas.microsoft.com/office/powerpoint/2010/main">
+    <mc:Choice Requires="p14">
       <p:transition spd="med" p14:dur="700">
         <p:fade/>
       </p:transition>
     </mc:Choice>
-    <mc:Fallback>
+    <mc:Fallback xmlns="">
       <p:transition spd="med">
         <p:fade/>
       </p:transition>
@@ -33297,8 +33297,8 @@
           </a:p>
         </p:txBody>
       </p:sp>
-      <mc:AlternateContent xmlns:mc="http://schemas.openxmlformats.org/markup-compatibility/2006">
-        <mc:Choice xmlns:a14="http://schemas.microsoft.com/office/drawing/2010/main" Requires="a14">
+      <mc:AlternateContent xmlns:mc="http://schemas.openxmlformats.org/markup-compatibility/2006" xmlns:a14="http://schemas.microsoft.com/office/drawing/2010/main">
+        <mc:Choice Requires="a14">
           <p:sp>
             <p:nvSpPr>
               <p:cNvPr id="321" name="Google Shape;321;p36">
@@ -33440,7 +33440,7 @@
             </p:txBody>
           </p:sp>
         </mc:Choice>
-        <mc:Fallback>
+        <mc:Fallback xmlns="">
           <p:sp>
             <p:nvSpPr>
               <p:cNvPr id="321" name="Google Shape;321;p36">
@@ -33545,13 +33545,13 @@
   <p:clrMapOvr>
     <a:masterClrMapping/>
   </p:clrMapOvr>
-  <mc:AlternateContent xmlns:mc="http://schemas.openxmlformats.org/markup-compatibility/2006">
-    <mc:Choice xmlns:p14="http://schemas.microsoft.com/office/powerpoint/2010/main" Requires="p14">
+  <mc:AlternateContent xmlns:mc="http://schemas.openxmlformats.org/markup-compatibility/2006" xmlns:p14="http://schemas.microsoft.com/office/powerpoint/2010/main">
+    <mc:Choice Requires="p14">
       <p:transition spd="med" p14:dur="700">
         <p:fade/>
       </p:transition>
     </mc:Choice>
-    <mc:Fallback>
+    <mc:Fallback xmlns="">
       <p:transition spd="med">
         <p:fade/>
       </p:transition>
@@ -33623,8 +33623,8 @@
           </a:p>
         </p:txBody>
       </p:sp>
-      <mc:AlternateContent xmlns:mc="http://schemas.openxmlformats.org/markup-compatibility/2006">
-        <mc:Choice xmlns:a14="http://schemas.microsoft.com/office/drawing/2010/main" Requires="a14">
+      <mc:AlternateContent xmlns:mc="http://schemas.openxmlformats.org/markup-compatibility/2006" xmlns:a14="http://schemas.microsoft.com/office/drawing/2010/main">
+        <mc:Choice Requires="a14">
           <p:sp>
             <p:nvSpPr>
               <p:cNvPr id="321" name="Google Shape;321;p36">
@@ -33823,7 +33823,7 @@
             </p:txBody>
           </p:sp>
         </mc:Choice>
-        <mc:Fallback>
+        <mc:Fallback xmlns="">
           <p:sp>
             <p:nvSpPr>
               <p:cNvPr id="321" name="Google Shape;321;p36">
@@ -33928,13 +33928,13 @@
   <p:clrMapOvr>
     <a:masterClrMapping/>
   </p:clrMapOvr>
-  <mc:AlternateContent xmlns:mc="http://schemas.openxmlformats.org/markup-compatibility/2006">
-    <mc:Choice xmlns:p14="http://schemas.microsoft.com/office/powerpoint/2010/main" Requires="p14">
+  <mc:AlternateContent xmlns:mc="http://schemas.openxmlformats.org/markup-compatibility/2006" xmlns:p14="http://schemas.microsoft.com/office/powerpoint/2010/main">
+    <mc:Choice Requires="p14">
       <p:transition spd="med" p14:dur="700">
         <p:fade/>
       </p:transition>
     </mc:Choice>
-    <mc:Fallback>
+    <mc:Fallback xmlns="">
       <p:transition spd="med">
         <p:fade/>
       </p:transition>
@@ -34140,50 +34140,6 @@
           </a:effectLst>
         </p:spPr>
       </p:pic>
-      <p:pic>
-        <p:nvPicPr>
-          <p:cNvPr id="6" name="Imagem 5">
-            <a:extLst>
-              <a:ext uri="{FF2B5EF4-FFF2-40B4-BE49-F238E27FC236}">
-                <a16:creationId xmlns:a16="http://schemas.microsoft.com/office/drawing/2014/main" id="{A2A47789-2E8C-283E-D3F8-2B1052C3D76D}"/>
-              </a:ext>
-            </a:extLst>
-          </p:cNvPr>
-          <p:cNvPicPr>
-            <a:picLocks noChangeAspect="1"/>
-          </p:cNvPicPr>
-          <p:nvPr/>
-        </p:nvPicPr>
-        <p:blipFill>
-          <a:blip r:embed="rId4"/>
-          <a:stretch>
-            <a:fillRect/>
-          </a:stretch>
-        </p:blipFill>
-        <p:spPr>
-          <a:xfrm>
-            <a:off x="4976539" y="2197776"/>
-            <a:ext cx="3454186" cy="2260830"/>
-          </a:xfrm>
-          <a:prstGeom prst="rect">
-            <a:avLst/>
-          </a:prstGeom>
-          <a:ln w="12700" cap="sq">
-            <a:solidFill>
-              <a:srgbClr val="000000"/>
-            </a:solidFill>
-            <a:prstDash val="solid"/>
-            <a:miter lim="800000"/>
-          </a:ln>
-          <a:effectLst>
-            <a:outerShdw blurRad="50800" dist="38100" dir="2700000" algn="tl" rotWithShape="0">
-              <a:srgbClr val="000000">
-                <a:alpha val="43000"/>
-              </a:srgbClr>
-            </a:outerShdw>
-          </a:effectLst>
-        </p:spPr>
-      </p:pic>
       <p:sp>
         <p:nvSpPr>
           <p:cNvPr id="8" name="CaixaDeTexto 7">
@@ -34256,6 +34212,50 @@
           </a:p>
         </p:txBody>
       </p:sp>
+      <p:pic>
+        <p:nvPicPr>
+          <p:cNvPr id="4" name="Imagem 3">
+            <a:extLst>
+              <a:ext uri="{FF2B5EF4-FFF2-40B4-BE49-F238E27FC236}">
+                <a16:creationId xmlns:a16="http://schemas.microsoft.com/office/drawing/2014/main" id="{0D866A58-F0A4-8E88-1390-F1B67E6FBBAB}"/>
+              </a:ext>
+            </a:extLst>
+          </p:cNvPr>
+          <p:cNvPicPr>
+            <a:picLocks noChangeAspect="1"/>
+          </p:cNvPicPr>
+          <p:nvPr/>
+        </p:nvPicPr>
+        <p:blipFill>
+          <a:blip r:embed="rId4"/>
+          <a:stretch>
+            <a:fillRect/>
+          </a:stretch>
+        </p:blipFill>
+        <p:spPr>
+          <a:xfrm>
+            <a:off x="4976539" y="2199827"/>
+            <a:ext cx="3454186" cy="2255820"/>
+          </a:xfrm>
+          <a:prstGeom prst="rect">
+            <a:avLst/>
+          </a:prstGeom>
+          <a:ln w="12700" cap="sq">
+            <a:solidFill>
+              <a:srgbClr val="000000"/>
+            </a:solidFill>
+            <a:prstDash val="solid"/>
+            <a:miter lim="800000"/>
+          </a:ln>
+          <a:effectLst>
+            <a:outerShdw blurRad="50800" dist="38100" dir="2700000" algn="tl" rotWithShape="0">
+              <a:srgbClr val="000000">
+                <a:alpha val="43000"/>
+              </a:srgbClr>
+            </a:outerShdw>
+          </a:effectLst>
+        </p:spPr>
+      </p:pic>
     </p:spTree>
     <p:extLst>
       <p:ext uri="{BB962C8B-B14F-4D97-AF65-F5344CB8AC3E}">
@@ -34266,13 +34266,13 @@
   <p:clrMapOvr>
     <a:masterClrMapping/>
   </p:clrMapOvr>
-  <mc:AlternateContent xmlns:mc="http://schemas.openxmlformats.org/markup-compatibility/2006">
-    <mc:Choice xmlns:p14="http://schemas.microsoft.com/office/powerpoint/2010/main" Requires="p14">
+  <mc:AlternateContent xmlns:mc="http://schemas.openxmlformats.org/markup-compatibility/2006" xmlns:p14="http://schemas.microsoft.com/office/powerpoint/2010/main">
+    <mc:Choice Requires="p14">
       <p:transition spd="med" p14:dur="700">
         <p:fade/>
       </p:transition>
     </mc:Choice>
-    <mc:Fallback>
+    <mc:Fallback xmlns="">
       <p:transition spd="med">
         <p:fade/>
       </p:transition>
@@ -34470,7 +34470,7 @@
         </p:blipFill>
         <p:spPr>
           <a:xfrm>
-            <a:off x="3473318" y="1981238"/>
+            <a:off x="3473316" y="2008461"/>
             <a:ext cx="2197313" cy="2217913"/>
           </a:xfrm>
           <a:prstGeom prst="rect">
@@ -34478,6 +34478,42 @@
           </a:prstGeom>
         </p:spPr>
       </p:pic>
+      <p:sp>
+        <p:nvSpPr>
+          <p:cNvPr id="2" name="CaixaDeTexto 1">
+            <a:extLst>
+              <a:ext uri="{FF2B5EF4-FFF2-40B4-BE49-F238E27FC236}">
+                <a16:creationId xmlns:a16="http://schemas.microsoft.com/office/drawing/2014/main" id="{9F28C7C1-CC5E-6847-5A49-B43074BD8A61}"/>
+              </a:ext>
+            </a:extLst>
+          </p:cNvPr>
+          <p:cNvSpPr txBox="1"/>
+          <p:nvPr/>
+        </p:nvSpPr>
+        <p:spPr>
+          <a:xfrm>
+            <a:off x="3392902" y="4226374"/>
+            <a:ext cx="2358143" cy="215444"/>
+          </a:xfrm>
+          <a:prstGeom prst="rect">
+            <a:avLst/>
+          </a:prstGeom>
+          <a:noFill/>
+        </p:spPr>
+        <p:txBody>
+          <a:bodyPr wrap="square">
+            <a:spAutoFit/>
+          </a:bodyPr>
+          <a:lstStyle/>
+          <a:p>
+            <a:pPr algn="ctr"/>
+            <a:r>
+              <a:rPr lang="pt-BR" sz="800" dirty="0"/>
+              <a:t>Tabela 1: Dados de renda e consumo</a:t>
+            </a:r>
+          </a:p>
+        </p:txBody>
+      </p:sp>
     </p:spTree>
     <p:extLst>
       <p:ext uri="{BB962C8B-B14F-4D97-AF65-F5344CB8AC3E}">
@@ -34488,13 +34524,13 @@
   <p:clrMapOvr>
     <a:masterClrMapping/>
   </p:clrMapOvr>
-  <mc:AlternateContent xmlns:mc="http://schemas.openxmlformats.org/markup-compatibility/2006">
-    <mc:Choice xmlns:p14="http://schemas.microsoft.com/office/powerpoint/2010/main" Requires="p14">
+  <mc:AlternateContent xmlns:mc="http://schemas.openxmlformats.org/markup-compatibility/2006" xmlns:p14="http://schemas.microsoft.com/office/powerpoint/2010/main">
+    <mc:Choice Requires="p14">
       <p:transition spd="med" p14:dur="700">
         <p:fade/>
       </p:transition>
     </mc:Choice>
-    <mc:Fallback>
+    <mc:Fallback xmlns="">
       <p:transition spd="med">
         <p:fade/>
       </p:transition>
@@ -34566,8 +34602,8 @@
           </a:p>
         </p:txBody>
       </p:sp>
-      <mc:AlternateContent xmlns:mc="http://schemas.openxmlformats.org/markup-compatibility/2006">
-        <mc:Choice xmlns:a14="http://schemas.microsoft.com/office/drawing/2010/main" Requires="a14">
+      <mc:AlternateContent xmlns:mc="http://schemas.openxmlformats.org/markup-compatibility/2006" xmlns:a14="http://schemas.microsoft.com/office/drawing/2010/main">
+        <mc:Choice Requires="a14">
           <p:sp>
             <p:nvSpPr>
               <p:cNvPr id="321" name="Google Shape;321;p36">
@@ -35159,7 +35195,7 @@
             </p:txBody>
           </p:sp>
         </mc:Choice>
-        <mc:Fallback>
+        <mc:Fallback xmlns="">
           <p:sp>
             <p:nvSpPr>
               <p:cNvPr id="321" name="Google Shape;321;p36">
@@ -35294,13 +35330,13 @@
   <p:clrMapOvr>
     <a:masterClrMapping/>
   </p:clrMapOvr>
-  <mc:AlternateContent xmlns:mc="http://schemas.openxmlformats.org/markup-compatibility/2006">
-    <mc:Choice xmlns:p14="http://schemas.microsoft.com/office/powerpoint/2010/main" Requires="p14">
+  <mc:AlternateContent xmlns:mc="http://schemas.openxmlformats.org/markup-compatibility/2006" xmlns:p14="http://schemas.microsoft.com/office/powerpoint/2010/main">
+    <mc:Choice Requires="p14">
       <p:transition spd="med" p14:dur="700">
         <p:fade/>
       </p:transition>
     </mc:Choice>
-    <mc:Fallback>
+    <mc:Fallback xmlns="">
       <p:transition spd="med">
         <p:fade/>
       </p:transition>
@@ -35372,8 +35408,8 @@
           </a:p>
         </p:txBody>
       </p:sp>
-      <mc:AlternateContent xmlns:mc="http://schemas.openxmlformats.org/markup-compatibility/2006">
-        <mc:Choice xmlns:a14="http://schemas.microsoft.com/office/drawing/2010/main" Requires="a14">
+      <mc:AlternateContent xmlns:mc="http://schemas.openxmlformats.org/markup-compatibility/2006" xmlns:a14="http://schemas.microsoft.com/office/drawing/2010/main">
+        <mc:Choice Requires="a14">
           <p:sp>
             <p:nvSpPr>
               <p:cNvPr id="321" name="Google Shape;321;p36">
@@ -36035,7 +36071,7 @@
             </p:txBody>
           </p:sp>
         </mc:Choice>
-        <mc:Fallback>
+        <mc:Fallback xmlns="">
           <p:sp>
             <p:nvSpPr>
               <p:cNvPr id="321" name="Google Shape;321;p36">
@@ -36152,7 +36188,7 @@
         </p:blipFill>
         <p:spPr>
           <a:xfrm>
-            <a:off x="2833432" y="3004600"/>
+            <a:off x="3433507" y="3039438"/>
             <a:ext cx="1474991" cy="1710413"/>
           </a:xfrm>
           <a:prstGeom prst="rect">
@@ -36182,7 +36218,7 @@
         </p:blipFill>
         <p:spPr>
           <a:xfrm>
-            <a:off x="4308423" y="3004600"/>
+            <a:off x="4908498" y="3039438"/>
             <a:ext cx="527103" cy="1752619"/>
           </a:xfrm>
           <a:prstGeom prst="rect">
@@ -36200,13 +36236,13 @@
   <p:clrMapOvr>
     <a:masterClrMapping/>
   </p:clrMapOvr>
-  <mc:AlternateContent xmlns:mc="http://schemas.openxmlformats.org/markup-compatibility/2006">
-    <mc:Choice xmlns:p14="http://schemas.microsoft.com/office/powerpoint/2010/main" Requires="p14">
+  <mc:AlternateContent xmlns:mc="http://schemas.openxmlformats.org/markup-compatibility/2006" xmlns:p14="http://schemas.microsoft.com/office/powerpoint/2010/main">
+    <mc:Choice Requires="p14">
       <p:transition spd="med" p14:dur="700">
         <p:fade/>
       </p:transition>
     </mc:Choice>
-    <mc:Fallback>
+    <mc:Fallback xmlns="">
       <p:transition spd="med">
         <p:fade/>
       </p:transition>
@@ -36278,8 +36314,8 @@
           </a:p>
         </p:txBody>
       </p:sp>
-      <mc:AlternateContent xmlns:mc="http://schemas.openxmlformats.org/markup-compatibility/2006">
-        <mc:Choice xmlns:a14="http://schemas.microsoft.com/office/drawing/2010/main" Requires="a14">
+      <mc:AlternateContent xmlns:mc="http://schemas.openxmlformats.org/markup-compatibility/2006" xmlns:a14="http://schemas.microsoft.com/office/drawing/2010/main">
+        <mc:Choice Requires="a14">
           <p:sp>
             <p:nvSpPr>
               <p:cNvPr id="321" name="Google Shape;321;p36">
@@ -36469,7 +36505,7 @@
             </p:txBody>
           </p:sp>
         </mc:Choice>
-        <mc:Fallback>
+        <mc:Fallback xmlns="">
           <p:sp>
             <p:nvSpPr>
               <p:cNvPr id="321" name="Google Shape;321;p36">
@@ -36694,13 +36730,13 @@
   <p:clrMapOvr>
     <a:masterClrMapping/>
   </p:clrMapOvr>
-  <mc:AlternateContent xmlns:mc="http://schemas.openxmlformats.org/markup-compatibility/2006">
-    <mc:Choice xmlns:p14="http://schemas.microsoft.com/office/powerpoint/2010/main" Requires="p14">
+  <mc:AlternateContent xmlns:mc="http://schemas.openxmlformats.org/markup-compatibility/2006" xmlns:p14="http://schemas.microsoft.com/office/powerpoint/2010/main">
+    <mc:Choice Requires="p14">
       <p:transition spd="med" p14:dur="700">
         <p:fade/>
       </p:transition>
     </mc:Choice>
-    <mc:Fallback>
+    <mc:Fallback xmlns="">
       <p:transition spd="med">
         <p:fade/>
       </p:transition>
@@ -36825,6 +36861,14 @@
                 </a:solidFill>
               </a:rPr>
               <a:t>outliers</a:t>
+            </a:r>
+            <a:r>
+              <a:rPr lang="pt-BR" dirty="0">
+                <a:solidFill>
+                  <a:schemeClr val="tx1"/>
+                </a:solidFill>
+              </a:rPr>
+              <a:t>.</a:t>
             </a:r>
           </a:p>
           <a:p>
@@ -37003,13 +37047,13 @@
   <p:clrMapOvr>
     <a:masterClrMapping/>
   </p:clrMapOvr>
-  <mc:AlternateContent xmlns:mc="http://schemas.openxmlformats.org/markup-compatibility/2006">
-    <mc:Choice xmlns:p14="http://schemas.microsoft.com/office/powerpoint/2010/main" Requires="p14">
+  <mc:AlternateContent xmlns:mc="http://schemas.openxmlformats.org/markup-compatibility/2006" xmlns:p14="http://schemas.microsoft.com/office/powerpoint/2010/main">
+    <mc:Choice Requires="p14">
       <p:transition spd="med" p14:dur="700">
         <p:fade/>
       </p:transition>
     </mc:Choice>
-    <mc:Fallback>
+    <mc:Fallback xmlns="">
       <p:transition spd="med">
         <p:fade/>
       </p:transition>
@@ -37081,8 +37125,8 @@
           </a:p>
         </p:txBody>
       </p:sp>
-      <mc:AlternateContent xmlns:mc="http://schemas.openxmlformats.org/markup-compatibility/2006">
-        <mc:Choice xmlns:a14="http://schemas.microsoft.com/office/drawing/2010/main" Requires="a14">
+      <mc:AlternateContent xmlns:mc="http://schemas.openxmlformats.org/markup-compatibility/2006" xmlns:a14="http://schemas.microsoft.com/office/drawing/2010/main">
+        <mc:Choice Requires="a14">
           <p:sp>
             <p:nvSpPr>
               <p:cNvPr id="321" name="Google Shape;321;p36">
@@ -37622,7 +37666,7 @@
             </p:txBody>
           </p:sp>
         </mc:Choice>
-        <mc:Fallback>
+        <mc:Fallback xmlns="">
           <p:sp>
             <p:nvSpPr>
               <p:cNvPr id="321" name="Google Shape;321;p36">
@@ -37727,13 +37771,13 @@
   <p:clrMapOvr>
     <a:masterClrMapping/>
   </p:clrMapOvr>
-  <mc:AlternateContent xmlns:mc="http://schemas.openxmlformats.org/markup-compatibility/2006">
-    <mc:Choice xmlns:p14="http://schemas.microsoft.com/office/powerpoint/2010/main" Requires="p14">
+  <mc:AlternateContent xmlns:mc="http://schemas.openxmlformats.org/markup-compatibility/2006" xmlns:p14="http://schemas.microsoft.com/office/powerpoint/2010/main">
+    <mc:Choice Requires="p14">
       <p:transition spd="med" p14:dur="700">
         <p:fade/>
       </p:transition>
     </mc:Choice>
-    <mc:Fallback>
+    <mc:Fallback xmlns="">
       <p:transition spd="med">
         <p:fade/>
       </p:transition>
@@ -37787,7 +37831,7 @@
             <a:pPr lvl="0" algn="l"/>
             <a:r>
               <a:rPr lang="pt-BR" dirty="0"/>
-              <a:t>Visão Geral do Projeto</a:t>
+              <a:t>Visão Geral do Trabalho</a:t>
             </a:r>
             <a:endParaRPr dirty="0"/>
           </a:p>
@@ -38141,7 +38185,7 @@
                 </a:pPr>
                 <a:r>
                   <a:rPr lang="pt-BR" dirty="0"/>
-                  <a:t>Ajuste com Restrição (ponto de controle)</a:t>
+                  <a:t>Ajuste com Restrição </a:t>
                 </a:r>
               </a:p>
               <a:p>
@@ -38326,210 +38370,325 @@
           </a:p>
         </p:txBody>
       </p:sp>
-      <p:sp>
-        <p:nvSpPr>
-          <p:cNvPr id="321" name="Google Shape;321;p36">
-            <a:extLst>
-              <a:ext uri="{FF2B5EF4-FFF2-40B4-BE49-F238E27FC236}">
-                <a16:creationId xmlns:a16="http://schemas.microsoft.com/office/drawing/2014/main" id="{BAF1CC88-EFE9-FD81-9097-3366B2F6F324}"/>
-              </a:ext>
-            </a:extLst>
-          </p:cNvPr>
-          <p:cNvSpPr txBox="1">
-            <a:spLocks noGrp="1"/>
-          </p:cNvSpPr>
-          <p:nvPr>
-            <p:ph type="subTitle" idx="1"/>
-          </p:nvPr>
-        </p:nvSpPr>
-        <p:spPr>
-          <a:xfrm>
-            <a:off x="713250" y="1217050"/>
-            <a:ext cx="7717500" cy="3575100"/>
-          </a:xfrm>
-          <a:prstGeom prst="rect">
-            <a:avLst/>
-          </a:prstGeom>
-        </p:spPr>
-        <p:txBody>
-          <a:bodyPr spcFirstLastPara="1" wrap="square" lIns="91425" tIns="91425" rIns="91425" bIns="91425" anchor="t" anchorCtr="0">
-            <a:noAutofit/>
-          </a:bodyPr>
-          <a:lstStyle/>
-          <a:p>
-            <a:pPr marL="425450" indent="-285750" algn="l">
-              <a:lnSpc>
-                <a:spcPct val="150000"/>
-              </a:lnSpc>
-              <a:buFont typeface="Wingdings" panose="05000000000000000000" pitchFamily="2" charset="2"/>
-              <a:buChar char="q"/>
-            </a:pPr>
-            <a:r>
-              <a:rPr lang="pt-BR" dirty="0">
-                <a:solidFill>
-                  <a:schemeClr val="tx1"/>
-                </a:solidFill>
-              </a:rPr>
-              <a:t>Para isso precisamos olhar para o modelo restrito </a:t>
-            </a:r>
-          </a:p>
-          <a:p>
-            <a:pPr marL="425450" indent="-285750" algn="l">
-              <a:lnSpc>
-                <a:spcPct val="150000"/>
-              </a:lnSpc>
-              <a:buFont typeface="Wingdings" panose="05000000000000000000" pitchFamily="2" charset="2"/>
-              <a:buChar char="q"/>
-            </a:pPr>
-            <a:endParaRPr lang="pt-BR" dirty="0">
-              <a:solidFill>
-                <a:schemeClr val="tx1"/>
-              </a:solidFill>
-            </a:endParaRPr>
-          </a:p>
-          <a:p>
-            <a:pPr marL="425450" indent="-285750" algn="l">
-              <a:lnSpc>
-                <a:spcPct val="150000"/>
-              </a:lnSpc>
-              <a:buFont typeface="Wingdings" panose="05000000000000000000" pitchFamily="2" charset="2"/>
-              <a:buChar char="q"/>
-            </a:pPr>
-            <a:endParaRPr lang="pt-BR" dirty="0">
-              <a:solidFill>
-                <a:schemeClr val="tx1"/>
-              </a:solidFill>
-            </a:endParaRPr>
-          </a:p>
-          <a:p>
-            <a:pPr marL="425450" indent="-285750" algn="l">
-              <a:lnSpc>
-                <a:spcPct val="150000"/>
-              </a:lnSpc>
-              <a:buFont typeface="Wingdings" panose="05000000000000000000" pitchFamily="2" charset="2"/>
-              <a:buChar char="q"/>
-            </a:pPr>
-            <a:endParaRPr lang="pt-BR" dirty="0">
-              <a:solidFill>
-                <a:schemeClr val="tx1"/>
-              </a:solidFill>
-            </a:endParaRPr>
-          </a:p>
-          <a:p>
-            <a:pPr marL="425450" indent="-285750" algn="l">
-              <a:lnSpc>
-                <a:spcPct val="150000"/>
-              </a:lnSpc>
-              <a:buFont typeface="Wingdings" panose="05000000000000000000" pitchFamily="2" charset="2"/>
-              <a:buChar char="q"/>
-            </a:pPr>
-            <a:r>
-              <a:rPr lang="pt-BR" dirty="0">
-                <a:solidFill>
-                  <a:schemeClr val="tx1"/>
-                </a:solidFill>
-              </a:rPr>
-              <a:t>E temos agora vetores de restrição para os 2 casos</a:t>
-            </a:r>
-          </a:p>
-          <a:p>
-            <a:pPr marL="882650" lvl="1" indent="-285750" algn="l">
-              <a:lnSpc>
-                <a:spcPct val="150000"/>
-              </a:lnSpc>
-              <a:buFont typeface="Wingdings" panose="05000000000000000000" pitchFamily="2" charset="2"/>
-              <a:buChar char="q"/>
-            </a:pPr>
-            <a:r>
-              <a:rPr lang="pt-BR" dirty="0">
-                <a:solidFill>
-                  <a:schemeClr val="tx1"/>
-                </a:solidFill>
-              </a:rPr>
-              <a:t>Linear </a:t>
-            </a:r>
-          </a:p>
-          <a:p>
-            <a:pPr marL="1339850" lvl="2" indent="-285750" algn="l">
-              <a:lnSpc>
-                <a:spcPct val="150000"/>
-              </a:lnSpc>
-              <a:buFont typeface="Wingdings" panose="05000000000000000000" pitchFamily="2" charset="2"/>
-              <a:buChar char="q"/>
-            </a:pPr>
-            <a:r>
-              <a:rPr lang="pt-BR" dirty="0">
-                <a:solidFill>
-                  <a:schemeClr val="tx1"/>
-                </a:solidFill>
-              </a:rPr>
-              <a:t>G = [ 1	    163]</a:t>
-            </a:r>
-          </a:p>
-          <a:p>
-            <a:pPr marL="882650" lvl="1" indent="-285750" algn="l">
-              <a:lnSpc>
-                <a:spcPct val="150000"/>
-              </a:lnSpc>
-              <a:buFont typeface="Wingdings" panose="05000000000000000000" pitchFamily="2" charset="2"/>
-              <a:buChar char="q"/>
-            </a:pPr>
-            <a:r>
-              <a:rPr lang="pt-BR" dirty="0">
-                <a:solidFill>
-                  <a:schemeClr val="tx1"/>
-                </a:solidFill>
-              </a:rPr>
-              <a:t>Quadrático </a:t>
-            </a:r>
-          </a:p>
-          <a:p>
-            <a:pPr marL="1339850" lvl="2" indent="-285750" algn="l">
-              <a:lnSpc>
-                <a:spcPct val="150000"/>
-              </a:lnSpc>
-              <a:buFont typeface="Wingdings" panose="05000000000000000000" pitchFamily="2" charset="2"/>
-              <a:buChar char="q"/>
-            </a:pPr>
-            <a:r>
-              <a:rPr lang="pt-BR" dirty="0">
-                <a:solidFill>
-                  <a:schemeClr val="tx1"/>
-                </a:solidFill>
-              </a:rPr>
-              <a:t>G = [ 1	    163    163]</a:t>
-            </a:r>
-          </a:p>
-          <a:p>
-            <a:pPr marL="1339850" lvl="2" indent="-285750" algn="l">
-              <a:lnSpc>
-                <a:spcPct val="150000"/>
-              </a:lnSpc>
-              <a:buFont typeface="Wingdings" panose="05000000000000000000" pitchFamily="2" charset="2"/>
-              <a:buChar char="q"/>
-            </a:pPr>
-            <a:endParaRPr lang="pt-BR" dirty="0">
-              <a:solidFill>
-                <a:schemeClr val="tx1"/>
-              </a:solidFill>
-            </a:endParaRPr>
-          </a:p>
-          <a:p>
-            <a:pPr marL="882650" lvl="1" indent="-285750" algn="l">
-              <a:lnSpc>
-                <a:spcPct val="150000"/>
-              </a:lnSpc>
-              <a:buFont typeface="Wingdings" panose="05000000000000000000" pitchFamily="2" charset="2"/>
-              <a:buChar char="q"/>
-            </a:pPr>
-            <a:endParaRPr lang="pt-BR" dirty="0">
-              <a:solidFill>
-                <a:srgbClr val="980000"/>
-              </a:solidFill>
-            </a:endParaRPr>
-          </a:p>
-        </p:txBody>
-      </p:sp>
+      <mc:AlternateContent xmlns:mc="http://schemas.openxmlformats.org/markup-compatibility/2006">
+        <mc:Choice xmlns:a14="http://schemas.microsoft.com/office/drawing/2010/main" Requires="a14">
+          <p:sp>
+            <p:nvSpPr>
+              <p:cNvPr id="321" name="Google Shape;321;p36">
+                <a:extLst>
+                  <a:ext uri="{FF2B5EF4-FFF2-40B4-BE49-F238E27FC236}">
+                    <a16:creationId xmlns:a16="http://schemas.microsoft.com/office/drawing/2014/main" id="{BAF1CC88-EFE9-FD81-9097-3366B2F6F324}"/>
+                  </a:ext>
+                </a:extLst>
+              </p:cNvPr>
+              <p:cNvSpPr txBox="1">
+                <a:spLocks noGrp="1"/>
+              </p:cNvSpPr>
+              <p:nvPr>
+                <p:ph type="subTitle" idx="1"/>
+              </p:nvPr>
+            </p:nvSpPr>
+            <p:spPr>
+              <a:xfrm>
+                <a:off x="713250" y="1217050"/>
+                <a:ext cx="7717500" cy="3575100"/>
+              </a:xfrm>
+              <a:prstGeom prst="rect">
+                <a:avLst/>
+              </a:prstGeom>
+            </p:spPr>
+            <p:txBody>
+              <a:bodyPr spcFirstLastPara="1" wrap="square" lIns="91425" tIns="91425" rIns="91425" bIns="91425" anchor="t" anchorCtr="0">
+                <a:noAutofit/>
+              </a:bodyPr>
+              <a:lstStyle/>
+              <a:p>
+                <a:pPr marL="425450" indent="-285750" algn="l">
+                  <a:lnSpc>
+                    <a:spcPct val="150000"/>
+                  </a:lnSpc>
+                  <a:buFont typeface="Wingdings" panose="05000000000000000000" pitchFamily="2" charset="2"/>
+                  <a:buChar char="q"/>
+                </a:pPr>
+                <a:r>
+                  <a:rPr lang="pt-BR" dirty="0">
+                    <a:solidFill>
+                      <a:schemeClr val="tx1"/>
+                    </a:solidFill>
+                  </a:rPr>
+                  <a:t>Para isso precisamos olhar para o modelo restrito </a:t>
+                </a:r>
+              </a:p>
+              <a:p>
+                <a:pPr marL="425450" indent="-285750" algn="l">
+                  <a:lnSpc>
+                    <a:spcPct val="150000"/>
+                  </a:lnSpc>
+                  <a:buFont typeface="Wingdings" panose="05000000000000000000" pitchFamily="2" charset="2"/>
+                  <a:buChar char="q"/>
+                </a:pPr>
+                <a:endParaRPr lang="pt-BR" dirty="0">
+                  <a:solidFill>
+                    <a:schemeClr val="tx1"/>
+                  </a:solidFill>
+                </a:endParaRPr>
+              </a:p>
+              <a:p>
+                <a:pPr marL="425450" indent="-285750" algn="l">
+                  <a:lnSpc>
+                    <a:spcPct val="150000"/>
+                  </a:lnSpc>
+                  <a:buFont typeface="Wingdings" panose="05000000000000000000" pitchFamily="2" charset="2"/>
+                  <a:buChar char="q"/>
+                </a:pPr>
+                <a:endParaRPr lang="pt-BR" dirty="0">
+                  <a:solidFill>
+                    <a:schemeClr val="tx1"/>
+                  </a:solidFill>
+                </a:endParaRPr>
+              </a:p>
+              <a:p>
+                <a:pPr marL="425450" indent="-285750" algn="l">
+                  <a:lnSpc>
+                    <a:spcPct val="150000"/>
+                  </a:lnSpc>
+                  <a:buFont typeface="Wingdings" panose="05000000000000000000" pitchFamily="2" charset="2"/>
+                  <a:buChar char="q"/>
+                </a:pPr>
+                <a:endParaRPr lang="pt-BR" dirty="0">
+                  <a:solidFill>
+                    <a:schemeClr val="tx1"/>
+                  </a:solidFill>
+                </a:endParaRPr>
+              </a:p>
+              <a:p>
+                <a:pPr marL="425450" indent="-285750" algn="l">
+                  <a:lnSpc>
+                    <a:spcPct val="150000"/>
+                  </a:lnSpc>
+                  <a:buFont typeface="Wingdings" panose="05000000000000000000" pitchFamily="2" charset="2"/>
+                  <a:buChar char="q"/>
+                </a:pPr>
+                <a:r>
+                  <a:rPr lang="pt-BR" dirty="0">
+                    <a:solidFill>
+                      <a:schemeClr val="tx1"/>
+                    </a:solidFill>
+                  </a:rPr>
+                  <a:t>E temos agora vetores de restrição para os 2 casos e podemos resolver o sistema</a:t>
+                </a:r>
+              </a:p>
+              <a:p>
+                <a:pPr marL="882650" lvl="1" indent="-285750" algn="l">
+                  <a:lnSpc>
+                    <a:spcPct val="150000"/>
+                  </a:lnSpc>
+                  <a:buFont typeface="Wingdings" panose="05000000000000000000" pitchFamily="2" charset="2"/>
+                  <a:buChar char="q"/>
+                </a:pPr>
+                <a:r>
+                  <a:rPr lang="pt-BR" dirty="0">
+                    <a:solidFill>
+                      <a:schemeClr val="tx1"/>
+                    </a:solidFill>
+                  </a:rPr>
+                  <a:t>Linear </a:t>
+                </a:r>
+              </a:p>
+              <a:p>
+                <a:pPr marL="1339850" lvl="2" indent="-285750" algn="l">
+                  <a:lnSpc>
+                    <a:spcPct val="150000"/>
+                  </a:lnSpc>
+                  <a:buFont typeface="Wingdings" panose="05000000000000000000" pitchFamily="2" charset="2"/>
+                  <a:buChar char="q"/>
+                </a:pPr>
+                <a:r>
+                  <a:rPr lang="pt-BR" dirty="0">
+                    <a:solidFill>
+                      <a:schemeClr val="tx1"/>
+                    </a:solidFill>
+                  </a:rPr>
+                  <a:t>G = [ 1	    163]   	</a:t>
+                </a:r>
+                <a14:m>
+                  <m:oMath xmlns:m="http://schemas.openxmlformats.org/officeDocument/2006/math">
+                    <m:r>
+                      <a:rPr lang="pt-BR" b="0" i="0" dirty="0" smtClean="0">
+                        <a:solidFill>
+                          <a:schemeClr val="tx1"/>
+                        </a:solidFill>
+                        <a:latin typeface="Cambria Math" panose="02040503050406030204" pitchFamily="18" charset="0"/>
+                      </a:rPr>
+                      <m:t>         </m:t>
+                    </m:r>
+                    <m:r>
+                      <a:rPr lang="pt-BR" i="1" dirty="0" smtClean="0">
+                        <a:solidFill>
+                          <a:schemeClr val="tx1"/>
+                        </a:solidFill>
+                        <a:latin typeface="Cambria Math" panose="02040503050406030204" pitchFamily="18" charset="0"/>
+                      </a:rPr>
+                      <m:t>𝑢</m:t>
+                    </m:r>
+                  </m:oMath>
+                </a14:m>
+                <a:r>
+                  <a:rPr lang="pt-BR" dirty="0">
+                    <a:solidFill>
+                      <a:schemeClr val="tx1"/>
+                    </a:solidFill>
+                  </a:rPr>
+                  <a:t> = [146]   </a:t>
+                </a:r>
+              </a:p>
+              <a:p>
+                <a:pPr marL="882650" lvl="1" indent="-285750" algn="l">
+                  <a:lnSpc>
+                    <a:spcPct val="150000"/>
+                  </a:lnSpc>
+                  <a:buFont typeface="Wingdings" panose="05000000000000000000" pitchFamily="2" charset="2"/>
+                  <a:buChar char="q"/>
+                </a:pPr>
+                <a:r>
+                  <a:rPr lang="pt-BR" dirty="0">
+                    <a:solidFill>
+                      <a:schemeClr val="tx1"/>
+                    </a:solidFill>
+                  </a:rPr>
+                  <a:t>Quadrático </a:t>
+                </a:r>
+              </a:p>
+              <a:p>
+                <a:pPr marL="1339850" lvl="2" indent="-285750" algn="l">
+                  <a:lnSpc>
+                    <a:spcPct val="150000"/>
+                  </a:lnSpc>
+                  <a:buFont typeface="Wingdings" panose="05000000000000000000" pitchFamily="2" charset="2"/>
+                  <a:buChar char="q"/>
+                </a:pPr>
+                <a:r>
+                  <a:rPr lang="pt-BR" dirty="0">
+                    <a:solidFill>
+                      <a:schemeClr val="tx1"/>
+                    </a:solidFill>
+                  </a:rPr>
+                  <a:t>G = [ 1	    163    163]	          </a:t>
+                </a:r>
+                <a14:m>
+                  <m:oMath xmlns:m="http://schemas.openxmlformats.org/officeDocument/2006/math">
+                    <m:r>
+                      <a:rPr lang="pt-BR" i="1" dirty="0">
+                        <a:solidFill>
+                          <a:schemeClr val="tx1"/>
+                        </a:solidFill>
+                        <a:latin typeface="Cambria Math" panose="02040503050406030204" pitchFamily="18" charset="0"/>
+                      </a:rPr>
+                      <m:t>𝑢</m:t>
+                    </m:r>
+                  </m:oMath>
+                </a14:m>
+                <a:r>
+                  <a:rPr lang="pt-BR" dirty="0">
+                    <a:solidFill>
+                      <a:schemeClr val="tx1"/>
+                    </a:solidFill>
+                  </a:rPr>
+                  <a:t> = [146]   </a:t>
+                </a:r>
+              </a:p>
+              <a:p>
+                <a:pPr marL="1339850" lvl="2" indent="-285750" algn="l">
+                  <a:lnSpc>
+                    <a:spcPct val="150000"/>
+                  </a:lnSpc>
+                  <a:buFont typeface="Wingdings" panose="05000000000000000000" pitchFamily="2" charset="2"/>
+                  <a:buChar char="q"/>
+                </a:pPr>
+                <a:endParaRPr lang="pt-BR" dirty="0">
+                  <a:solidFill>
+                    <a:schemeClr val="tx1"/>
+                  </a:solidFill>
+                </a:endParaRPr>
+              </a:p>
+              <a:p>
+                <a:pPr marL="1339850" lvl="2" indent="-285750" algn="l">
+                  <a:lnSpc>
+                    <a:spcPct val="150000"/>
+                  </a:lnSpc>
+                  <a:buFont typeface="Wingdings" panose="05000000000000000000" pitchFamily="2" charset="2"/>
+                  <a:buChar char="q"/>
+                </a:pPr>
+                <a:endParaRPr lang="pt-BR" dirty="0">
+                  <a:solidFill>
+                    <a:schemeClr val="tx1"/>
+                  </a:solidFill>
+                </a:endParaRPr>
+              </a:p>
+              <a:p>
+                <a:pPr marL="882650" lvl="1" indent="-285750" algn="l">
+                  <a:lnSpc>
+                    <a:spcPct val="150000"/>
+                  </a:lnSpc>
+                  <a:buFont typeface="Wingdings" panose="05000000000000000000" pitchFamily="2" charset="2"/>
+                  <a:buChar char="q"/>
+                </a:pPr>
+                <a:endParaRPr lang="pt-BR" dirty="0">
+                  <a:solidFill>
+                    <a:srgbClr val="980000"/>
+                  </a:solidFill>
+                </a:endParaRPr>
+              </a:p>
+            </p:txBody>
+          </p:sp>
+        </mc:Choice>
+        <mc:Fallback>
+          <p:sp>
+            <p:nvSpPr>
+              <p:cNvPr id="321" name="Google Shape;321;p36">
+                <a:extLst>
+                  <a:ext uri="{FF2B5EF4-FFF2-40B4-BE49-F238E27FC236}">
+                    <a16:creationId xmlns:a16="http://schemas.microsoft.com/office/drawing/2014/main" id="{BAF1CC88-EFE9-FD81-9097-3366B2F6F324}"/>
+                  </a:ext>
+                </a:extLst>
+              </p:cNvPr>
+              <p:cNvSpPr txBox="1">
+                <a:spLocks noGrp="1" noRot="1" noChangeAspect="1" noMove="1" noResize="1" noEditPoints="1" noAdjustHandles="1" noChangeArrowheads="1" noChangeShapeType="1" noTextEdit="1"/>
+              </p:cNvSpPr>
+              <p:nvPr>
+                <p:ph type="subTitle" idx="1"/>
+              </p:nvPr>
+            </p:nvSpPr>
+            <p:spPr>
+              <a:xfrm>
+                <a:off x="713250" y="1217050"/>
+                <a:ext cx="7717500" cy="3575100"/>
+              </a:xfrm>
+              <a:prstGeom prst="rect">
+                <a:avLst/>
+              </a:prstGeom>
+              <a:blipFill>
+                <a:blip r:embed="rId3"/>
+                <a:stretch>
+                  <a:fillRect/>
+                </a:stretch>
+              </a:blipFill>
+            </p:spPr>
+            <p:txBody>
+              <a:bodyPr/>
+              <a:lstStyle/>
+              <a:p>
+                <a:r>
+                  <a:rPr lang="pt-BR">
+                    <a:noFill/>
+                  </a:rPr>
+                  <a:t> </a:t>
+                </a:r>
+              </a:p>
+            </p:txBody>
+          </p:sp>
+        </mc:Fallback>
+      </mc:AlternateContent>
       <p:sp>
         <p:nvSpPr>
           <p:cNvPr id="322" name="Google Shape;322;p36">
@@ -38593,7 +38752,7 @@
           <p:nvPr/>
         </p:nvPicPr>
         <p:blipFill>
-          <a:blip r:embed="rId3"/>
+          <a:blip r:embed="rId4"/>
           <a:stretch>
             <a:fillRect/>
           </a:stretch>
@@ -38618,13 +38777,13 @@
   <p:clrMapOvr>
     <a:masterClrMapping/>
   </p:clrMapOvr>
-  <mc:AlternateContent xmlns:mc="http://schemas.openxmlformats.org/markup-compatibility/2006">
-    <mc:Choice xmlns:p14="http://schemas.microsoft.com/office/powerpoint/2010/main" Requires="p14">
+  <mc:AlternateContent xmlns:mc="http://schemas.openxmlformats.org/markup-compatibility/2006" xmlns:p14="http://schemas.microsoft.com/office/powerpoint/2010/main">
+    <mc:Choice Requires="p14">
       <p:transition spd="med" p14:dur="700">
         <p:fade/>
       </p:transition>
     </mc:Choice>
-    <mc:Fallback>
+    <mc:Fallback xmlns="">
       <p:transition spd="med">
         <p:fade/>
       </p:transition>
@@ -38947,13 +39106,13 @@
   <p:clrMapOvr>
     <a:masterClrMapping/>
   </p:clrMapOvr>
-  <mc:AlternateContent xmlns:mc="http://schemas.openxmlformats.org/markup-compatibility/2006">
-    <mc:Choice xmlns:p14="http://schemas.microsoft.com/office/powerpoint/2010/main" Requires="p14">
+  <mc:AlternateContent xmlns:mc="http://schemas.openxmlformats.org/markup-compatibility/2006" xmlns:p14="http://schemas.microsoft.com/office/powerpoint/2010/main">
+    <mc:Choice Requires="p14">
       <p:transition spd="med" p14:dur="700">
         <p:fade/>
       </p:transition>
     </mc:Choice>
-    <mc:Fallback>
+    <mc:Fallback xmlns="">
       <p:transition spd="med">
         <p:fade/>
       </p:transition>
@@ -39321,13 +39480,13 @@
   <p:clrMapOvr>
     <a:masterClrMapping/>
   </p:clrMapOvr>
-  <mc:AlternateContent xmlns:mc="http://schemas.openxmlformats.org/markup-compatibility/2006">
-    <mc:Choice xmlns:p14="http://schemas.microsoft.com/office/powerpoint/2010/main" Requires="p14">
+  <mc:AlternateContent xmlns:mc="http://schemas.openxmlformats.org/markup-compatibility/2006" xmlns:p14="http://schemas.microsoft.com/office/powerpoint/2010/main">
+    <mc:Choice Requires="p14">
       <p:transition spd="med" p14:dur="700">
         <p:fade/>
       </p:transition>
     </mc:Choice>
-    <mc:Fallback>
+    <mc:Fallback xmlns="">
       <p:transition spd="med">
         <p:fade/>
       </p:transition>
@@ -40076,13 +40235,13 @@
   <p:clrMapOvr>
     <a:masterClrMapping/>
   </p:clrMapOvr>
-  <mc:AlternateContent xmlns:mc="http://schemas.openxmlformats.org/markup-compatibility/2006">
-    <mc:Choice xmlns:p14="http://schemas.microsoft.com/office/powerpoint/2010/main" Requires="p14">
+  <mc:AlternateContent xmlns:mc="http://schemas.openxmlformats.org/markup-compatibility/2006" xmlns:p14="http://schemas.microsoft.com/office/powerpoint/2010/main">
+    <mc:Choice Requires="p14">
       <p:transition spd="med" p14:dur="700">
         <p:fade/>
       </p:transition>
     </mc:Choice>
-    <mc:Fallback>
+    <mc:Fallback xmlns="">
       <p:transition spd="med">
         <p:fade/>
       </p:transition>
@@ -40154,8 +40313,8 @@
           </a:p>
         </p:txBody>
       </p:sp>
-      <mc:AlternateContent xmlns:mc="http://schemas.openxmlformats.org/markup-compatibility/2006">
-        <mc:Choice xmlns:a14="http://schemas.microsoft.com/office/drawing/2010/main" Requires="a14">
+      <mc:AlternateContent xmlns:mc="http://schemas.openxmlformats.org/markup-compatibility/2006" xmlns:a14="http://schemas.microsoft.com/office/drawing/2010/main">
+        <mc:Choice Requires="a14">
           <p:sp>
             <p:nvSpPr>
               <p:cNvPr id="321" name="Google Shape;321;p36">
@@ -40322,7 +40481,7 @@
                                 <a:rPr lang="pt-BR" b="0" i="1" smtClean="0">
                                   <a:latin typeface="Cambria Math" panose="02040503050406030204" pitchFamily="18" charset="0"/>
                                 </a:rPr>
-                                <m:t> - </m:t>
+                                <m:t> − </m:t>
                               </m:r>
                               <m:r>
                                 <a:rPr lang="pt-BR" b="0" i="1" smtClean="0">
@@ -40560,7 +40719,7 @@
                                 <a:rPr lang="pt-BR" b="0" i="1" smtClean="0">
                                   <a:latin typeface="Cambria Math" panose="02040503050406030204" pitchFamily="18" charset="0"/>
                                 </a:rPr>
-                                <m:t> - </m:t>
+                                <m:t> − </m:t>
                               </m:r>
                               <m:r>
                                 <a:rPr lang="pt-BR" b="0" i="1" smtClean="0">
@@ -40842,7 +41001,7 @@
             </p:txBody>
           </p:sp>
         </mc:Choice>
-        <mc:Fallback>
+        <mc:Fallback xmlns="">
           <p:sp>
             <p:nvSpPr>
               <p:cNvPr id="321" name="Google Shape;321;p36">
@@ -40977,13 +41136,13 @@
   <p:clrMapOvr>
     <a:masterClrMapping/>
   </p:clrMapOvr>
-  <mc:AlternateContent xmlns:mc="http://schemas.openxmlformats.org/markup-compatibility/2006">
-    <mc:Choice xmlns:p14="http://schemas.microsoft.com/office/powerpoint/2010/main" Requires="p14">
+  <mc:AlternateContent xmlns:mc="http://schemas.openxmlformats.org/markup-compatibility/2006" xmlns:p14="http://schemas.microsoft.com/office/powerpoint/2010/main">
+    <mc:Choice Requires="p14">
       <p:transition spd="med" p14:dur="700">
         <p:fade/>
       </p:transition>
     </mc:Choice>
-    <mc:Fallback>
+    <mc:Fallback xmlns="">
       <p:transition spd="med">
         <p:fade/>
       </p:transition>
@@ -41055,8 +41214,8 @@
           </a:p>
         </p:txBody>
       </p:sp>
-      <mc:AlternateContent xmlns:mc="http://schemas.openxmlformats.org/markup-compatibility/2006">
-        <mc:Choice xmlns:a14="http://schemas.microsoft.com/office/drawing/2010/main" Requires="a14">
+      <mc:AlternateContent xmlns:mc="http://schemas.openxmlformats.org/markup-compatibility/2006" xmlns:a14="http://schemas.microsoft.com/office/drawing/2010/main">
+        <mc:Choice Requires="a14">
           <p:sp>
             <p:nvSpPr>
               <p:cNvPr id="321" name="Google Shape;321;p36">
@@ -41242,6 +41401,11 @@
                     </m:r>
                   </m:oMath>
                 </a14:m>
+                <a:endParaRPr lang="pt-BR" dirty="0">
+                  <a:solidFill>
+                    <a:schemeClr val="tx1"/>
+                  </a:solidFill>
+                </a:endParaRPr>
               </a:p>
               <a:p>
                 <a:pPr lvl="0" algn="l">
@@ -41550,7 +41714,7 @@
             </p:txBody>
           </p:sp>
         </mc:Choice>
-        <mc:Fallback>
+        <mc:Fallback xmlns="">
           <p:sp>
             <p:nvSpPr>
               <p:cNvPr id="321" name="Google Shape;321;p36">
@@ -41685,13 +41849,13 @@
   <p:clrMapOvr>
     <a:masterClrMapping/>
   </p:clrMapOvr>
-  <mc:AlternateContent xmlns:mc="http://schemas.openxmlformats.org/markup-compatibility/2006">
-    <mc:Choice xmlns:p14="http://schemas.microsoft.com/office/powerpoint/2010/main" Requires="p14">
+  <mc:AlternateContent xmlns:mc="http://schemas.openxmlformats.org/markup-compatibility/2006" xmlns:p14="http://schemas.microsoft.com/office/powerpoint/2010/main">
+    <mc:Choice Requires="p14">
       <p:transition spd="med" p14:dur="700">
         <p:fade/>
       </p:transition>
     </mc:Choice>
-    <mc:Fallback>
+    <mc:Fallback xmlns="">
       <p:transition spd="med">
         <p:fade/>
       </p:transition>
@@ -41911,8 +42075,8 @@
           </a:effectLst>
         </p:spPr>
       </p:pic>
-      <mc:AlternateContent xmlns:mc="http://schemas.openxmlformats.org/markup-compatibility/2006">
-        <mc:Choice xmlns:a14="http://schemas.microsoft.com/office/drawing/2010/main" Requires="a14">
+      <mc:AlternateContent xmlns:mc="http://schemas.openxmlformats.org/markup-compatibility/2006" xmlns:a14="http://schemas.microsoft.com/office/drawing/2010/main">
+        <mc:Choice Requires="a14">
           <p:sp>
             <p:nvSpPr>
               <p:cNvPr id="6" name="CaixaDeTexto 5">
@@ -42074,7 +42238,7 @@
             </p:txBody>
           </p:sp>
         </mc:Choice>
-        <mc:Fallback>
+        <mc:Fallback xmlns="">
           <p:sp>
             <p:nvSpPr>
               <p:cNvPr id="6" name="CaixaDeTexto 5">
@@ -42129,13 +42293,13 @@
   <p:clrMapOvr>
     <a:masterClrMapping/>
   </p:clrMapOvr>
-  <mc:AlternateContent xmlns:mc="http://schemas.openxmlformats.org/markup-compatibility/2006">
-    <mc:Choice xmlns:p14="http://schemas.microsoft.com/office/powerpoint/2010/main" Requires="p14">
+  <mc:AlternateContent xmlns:mc="http://schemas.openxmlformats.org/markup-compatibility/2006" xmlns:p14="http://schemas.microsoft.com/office/powerpoint/2010/main">
+    <mc:Choice Requires="p14">
       <p:transition spd="med" p14:dur="700">
         <p:fade/>
       </p:transition>
     </mc:Choice>
-    <mc:Fallback>
+    <mc:Fallback xmlns="">
       <p:transition spd="med">
         <p:fade/>
       </p:transition>
@@ -42441,13 +42605,13 @@
   <p:clrMapOvr>
     <a:masterClrMapping/>
   </p:clrMapOvr>
-  <mc:AlternateContent xmlns:mc="http://schemas.openxmlformats.org/markup-compatibility/2006">
-    <mc:Choice xmlns:p14="http://schemas.microsoft.com/office/powerpoint/2010/main" Requires="p14">
+  <mc:AlternateContent xmlns:mc="http://schemas.openxmlformats.org/markup-compatibility/2006" xmlns:p14="http://schemas.microsoft.com/office/powerpoint/2010/main">
+    <mc:Choice Requires="p14">
       <p:transition spd="med" p14:dur="700">
         <p:fade/>
       </p:transition>
     </mc:Choice>
-    <mc:Fallback>
+    <mc:Fallback xmlns="">
       <p:transition spd="med">
         <p:fade/>
       </p:transition>
@@ -42740,10 +42904,10 @@
                           <m:rPr>
                             <m:sty m:val="p"/>
                           </m:rPr>
-                          <a:rPr lang="pt-BR" i="1">
+                          <a:rPr lang="pt-BR" b="0" i="1" smtClean="0">
                             <a:latin typeface="Cambria Math" panose="02040503050406030204" pitchFamily="18" charset="0"/>
                           </a:rPr>
-                          <m:t>i</m:t>
+                          <m:t>k</m:t>
                         </m:r>
                         <m:r>
                           <a:rPr lang="pt-BR" i="1">
@@ -42789,10 +42953,10 @@
                           <m:rPr>
                             <m:sty m:val="p"/>
                           </m:rPr>
-                          <a:rPr lang="pt-BR" i="1">
+                          <a:rPr lang="pt-BR" b="0" i="1" smtClean="0">
                             <a:latin typeface="Cambria Math" panose="02040503050406030204" pitchFamily="18" charset="0"/>
                           </a:rPr>
-                          <m:t>i</m:t>
+                          <m:t>k</m:t>
                         </m:r>
                       </m:sub>
                     </m:sSub>
@@ -42833,10 +42997,10 @@
                           <m:rPr>
                             <m:sty m:val="p"/>
                           </m:rPr>
-                          <a:rPr lang="pt-BR" i="1">
+                          <a:rPr lang="pt-BR" b="0" i="1" smtClean="0">
                             <a:latin typeface="Cambria Math" panose="02040503050406030204" pitchFamily="18" charset="0"/>
                           </a:rPr>
-                          <m:t>i</m:t>
+                          <m:t>k</m:t>
                         </m:r>
                       </m:sub>
                     </m:sSub>
@@ -42864,10 +43028,10 @@
                           <m:rPr>
                             <m:sty m:val="p"/>
                           </m:rPr>
-                          <a:rPr lang="pt-BR" i="1">
+                          <a:rPr lang="pt-BR" b="0" i="1" smtClean="0">
                             <a:latin typeface="Cambria Math" panose="02040503050406030204" pitchFamily="18" charset="0"/>
                           </a:rPr>
-                          <m:t>i</m:t>
+                          <m:t>k</m:t>
                         </m:r>
                       </m:sub>
                     </m:sSub>
@@ -42923,22 +43087,10 @@
                           <m:rPr>
                             <m:sty m:val="p"/>
                           </m:rPr>
-                          <a:rPr lang="pt-BR" i="1">
+                          <a:rPr lang="pt-BR" b="0" i="1" smtClean="0">
                             <a:latin typeface="Cambria Math" panose="02040503050406030204" pitchFamily="18" charset="0"/>
                           </a:rPr>
-                          <m:t>i</m:t>
-                        </m:r>
-                        <m:r>
-                          <a:rPr lang="pt-BR" i="1">
-                            <a:latin typeface="Cambria Math" panose="02040503050406030204" pitchFamily="18" charset="0"/>
-                          </a:rPr>
-                          <m:t>+</m:t>
-                        </m:r>
-                        <m:r>
-                          <a:rPr lang="pt-BR" i="1">
-                            <a:latin typeface="Cambria Math" panose="02040503050406030204" pitchFamily="18" charset="0"/>
-                          </a:rPr>
-                          <m:t>1</m:t>
+                          <m:t>k</m:t>
                         </m:r>
                       </m:sub>
                     </m:sSub>
@@ -42946,7 +43098,7 @@
                       <a:rPr lang="pt-BR" b="0" i="1" smtClean="0">
                         <a:latin typeface="Cambria Math" panose="02040503050406030204" pitchFamily="18" charset="0"/>
                       </a:rPr>
-                      <m:t>- </m:t>
+                      <m:t>− </m:t>
                     </m:r>
                     <m:sSub>
                       <m:sSubPr>
@@ -42972,10 +43124,22 @@
                           <m:rPr>
                             <m:sty m:val="p"/>
                           </m:rPr>
-                          <a:rPr lang="pt-BR" i="1">
+                          <a:rPr lang="pt-BR" b="0" i="1" smtClean="0">
                             <a:latin typeface="Cambria Math" panose="02040503050406030204" pitchFamily="18" charset="0"/>
                           </a:rPr>
-                          <m:t>i</m:t>
+                          <m:t>k</m:t>
+                        </m:r>
+                        <m:r>
+                          <a:rPr lang="pt-BR" b="0" i="1" smtClean="0">
+                            <a:latin typeface="Cambria Math" panose="02040503050406030204" pitchFamily="18" charset="0"/>
+                          </a:rPr>
+                          <m:t>+</m:t>
+                        </m:r>
+                        <m:r>
+                          <a:rPr lang="pt-BR" b="0" i="1" smtClean="0">
+                            <a:latin typeface="Cambria Math" panose="02040503050406030204" pitchFamily="18" charset="0"/>
+                          </a:rPr>
+                          <m:t>1</m:t>
                         </m:r>
                       </m:sub>
                     </m:sSub>
@@ -43028,10 +43192,10 @@
                           <m:rPr>
                             <m:sty m:val="p"/>
                           </m:rPr>
-                          <a:rPr lang="pt-BR" i="1">
+                          <a:rPr lang="pt-BR" b="0" i="1" smtClean="0">
                             <a:latin typeface="Cambria Math" panose="02040503050406030204" pitchFamily="18" charset="0"/>
                           </a:rPr>
-                          <m:t>i</m:t>
+                          <m:t>k</m:t>
                         </m:r>
                       </m:sub>
                     </m:sSub>
@@ -43059,10 +43223,10 @@
                           <m:rPr>
                             <m:sty m:val="p"/>
                           </m:rPr>
-                          <a:rPr lang="pt-BR" i="1">
+                          <a:rPr lang="pt-BR" b="0" i="1" smtClean="0">
                             <a:latin typeface="Cambria Math" panose="02040503050406030204" pitchFamily="18" charset="0"/>
                           </a:rPr>
-                          <m:t>i</m:t>
+                          <m:t>k</m:t>
                         </m:r>
                       </m:sub>
                     </m:sSub>
@@ -43100,72 +43264,98 @@
                     <m:sSub>
                       <m:sSubPr>
                         <m:ctrlPr>
-                          <a:rPr lang="ar-AE"/>
+                          <a:rPr lang="ar-AE" i="1">
+                            <a:latin typeface="Cambria Math" panose="02040503050406030204" pitchFamily="18" charset="0"/>
+                          </a:rPr>
                         </m:ctrlPr>
                       </m:sSubPr>
                       <m:e>
                         <m:r>
-                          <a:rPr lang="ar-AE" i="1"/>
+                          <a:rPr lang="ar-AE" i="1">
+                            <a:latin typeface="Cambria Math" panose="02040503050406030204" pitchFamily="18" charset="0"/>
+                          </a:rPr>
                           <m:t>𝑦</m:t>
                         </m:r>
                       </m:e>
                       <m:sub>
                         <m:r>
-                          <a:rPr lang="ar-AE" i="1"/>
+                          <a:rPr lang="ar-AE" i="1">
+                            <a:latin typeface="Cambria Math" panose="02040503050406030204" pitchFamily="18" charset="0"/>
+                          </a:rPr>
                           <m:t>𝑘</m:t>
                         </m:r>
                       </m:sub>
                     </m:sSub>
                     <m:r>
-                      <a:rPr lang="ar-AE"/>
+                      <a:rPr lang="ar-AE">
+                        <a:latin typeface="Cambria Math" panose="02040503050406030204" pitchFamily="18" charset="0"/>
+                      </a:rPr>
                       <m:t>=</m:t>
                     </m:r>
                     <m:sSub>
                       <m:sSubPr>
                         <m:ctrlPr>
-                          <a:rPr lang="ar-AE" i="1"/>
+                          <a:rPr lang="ar-AE" i="1">
+                            <a:latin typeface="Cambria Math" panose="02040503050406030204" pitchFamily="18" charset="0"/>
+                          </a:rPr>
                         </m:ctrlPr>
                       </m:sSubPr>
                       <m:e>
                         <m:r>
-                          <a:rPr lang="ar-AE" i="1"/>
+                          <a:rPr lang="ar-AE" i="1">
+                            <a:latin typeface="Cambria Math" panose="02040503050406030204" pitchFamily="18" charset="0"/>
+                          </a:rPr>
                           <m:t>𝑆</m:t>
                         </m:r>
                       </m:e>
                       <m:sub>
                         <m:r>
-                          <a:rPr lang="ar-AE" i="1"/>
+                          <a:rPr lang="ar-AE" i="1">
+                            <a:latin typeface="Cambria Math" panose="02040503050406030204" pitchFamily="18" charset="0"/>
+                          </a:rPr>
                           <m:t>𝑘</m:t>
                         </m:r>
                       </m:sub>
                     </m:sSub>
                     <m:r>
-                      <a:rPr lang="ar-AE"/>
+                      <a:rPr lang="ar-AE">
+                        <a:latin typeface="Cambria Math" panose="02040503050406030204" pitchFamily="18" charset="0"/>
+                      </a:rPr>
                       <m:t>−</m:t>
                     </m:r>
                     <m:sSub>
                       <m:sSubPr>
                         <m:ctrlPr>
-                          <a:rPr lang="ar-AE" i="1"/>
+                          <a:rPr lang="ar-AE" i="1">
+                            <a:latin typeface="Cambria Math" panose="02040503050406030204" pitchFamily="18" charset="0"/>
+                          </a:rPr>
                         </m:ctrlPr>
                       </m:sSubPr>
                       <m:e>
                         <m:r>
-                          <a:rPr lang="ar-AE" i="1"/>
+                          <a:rPr lang="ar-AE" i="1">
+                            <a:latin typeface="Cambria Math" panose="02040503050406030204" pitchFamily="18" charset="0"/>
+                          </a:rPr>
                           <m:t>𝑆</m:t>
                         </m:r>
                       </m:e>
                       <m:sub>
                         <m:r>
-                          <a:rPr lang="ar-AE" i="1"/>
+                          <a:rPr lang="ar-AE" i="1">
+                            <a:latin typeface="Cambria Math" panose="02040503050406030204" pitchFamily="18" charset="0"/>
+                          </a:rPr>
                           <m:t>𝑘</m:t>
                         </m:r>
                         <m:r>
-                          <a:rPr lang="ar-AE"/>
+                          <a:rPr lang="ar-AE">
+                            <a:latin typeface="Cambria Math" panose="02040503050406030204" pitchFamily="18" charset="0"/>
+                          </a:rPr>
                           <m:t>+</m:t>
                         </m:r>
                         <m:r>
-                          <a:rPr lang="ar-AE"/>
+                          <a:rPr lang="ar-AE">
+                            <a:latin typeface="Cambria Math" panose="02040503050406030204" pitchFamily="18" charset="0"/>
+                          </a:rPr>
                           <m:t>1</m:t>
                         </m:r>
                       </m:sub>
@@ -43187,41 +43377,55 @@
                     <m:sSub>
                       <m:sSubPr>
                         <m:ctrlPr>
-                          <a:rPr lang="ar-AE"/>
+                          <a:rPr lang="ar-AE" i="1">
+                            <a:latin typeface="Cambria Math" panose="02040503050406030204" pitchFamily="18" charset="0"/>
+                          </a:rPr>
                         </m:ctrlPr>
                       </m:sSubPr>
                       <m:e>
                         <m:r>
-                          <a:rPr lang="ar-AE" i="1"/>
+                          <a:rPr lang="ar-AE" i="1">
+                            <a:latin typeface="Cambria Math" panose="02040503050406030204" pitchFamily="18" charset="0"/>
+                          </a:rPr>
                           <m:t>𝑥</m:t>
                         </m:r>
                       </m:e>
                       <m:sub>
                         <m:r>
-                          <a:rPr lang="ar-AE" i="1"/>
+                          <a:rPr lang="ar-AE" i="1">
+                            <a:latin typeface="Cambria Math" panose="02040503050406030204" pitchFamily="18" charset="0"/>
+                          </a:rPr>
                           <m:t>𝑘</m:t>
                         </m:r>
                       </m:sub>
                     </m:sSub>
                     <m:r>
-                      <a:rPr lang="ar-AE"/>
+                      <a:rPr lang="ar-AE">
+                        <a:latin typeface="Cambria Math" panose="02040503050406030204" pitchFamily="18" charset="0"/>
+                      </a:rPr>
                       <m:t>=</m:t>
                     </m:r>
                     <m:sSub>
                       <m:sSubPr>
                         <m:ctrlPr>
-                          <a:rPr lang="ar-AE" i="1"/>
+                          <a:rPr lang="ar-AE" i="1">
+                            <a:latin typeface="Cambria Math" panose="02040503050406030204" pitchFamily="18" charset="0"/>
+                          </a:rPr>
                         </m:ctrlPr>
                       </m:sSubPr>
                       <m:e>
                         <m:r>
-                          <a:rPr lang="ar-AE" i="1"/>
+                          <a:rPr lang="ar-AE" i="1">
+                            <a:latin typeface="Cambria Math" panose="02040503050406030204" pitchFamily="18" charset="0"/>
+                          </a:rPr>
                           <m:t>𝑆</m:t>
                         </m:r>
                       </m:e>
                       <m:sub>
                         <m:r>
-                          <a:rPr lang="ar-AE" i="1"/>
+                          <a:rPr lang="ar-AE" i="1">
+                            <a:latin typeface="Cambria Math" panose="02040503050406030204" pitchFamily="18" charset="0"/>
+                          </a:rPr>
                           <m:t>𝑘</m:t>
                         </m:r>
                       </m:sub>
@@ -43229,18 +43433,24 @@
                     <m:sSub>
                       <m:sSubPr>
                         <m:ctrlPr>
-                          <a:rPr lang="ar-AE" i="1"/>
+                          <a:rPr lang="ar-AE" i="1">
+                            <a:latin typeface="Cambria Math" panose="02040503050406030204" pitchFamily="18" charset="0"/>
+                          </a:rPr>
                         </m:ctrlPr>
                       </m:sSubPr>
                       <m:e>
                         <m:r>
-                          <a:rPr lang="ar-AE" i="1"/>
+                          <a:rPr lang="ar-AE" i="1">
+                            <a:latin typeface="Cambria Math" panose="02040503050406030204" pitchFamily="18" charset="0"/>
+                          </a:rPr>
                           <m:t>𝐼</m:t>
                         </m:r>
                       </m:e>
                       <m:sub>
                         <m:r>
-                          <a:rPr lang="ar-AE" i="1"/>
+                          <a:rPr lang="ar-AE" i="1">
+                            <a:latin typeface="Cambria Math" panose="02040503050406030204" pitchFamily="18" charset="0"/>
+                          </a:rPr>
                           <m:t>𝑘</m:t>
                         </m:r>
                       </m:sub>
@@ -43316,19 +43526,7 @@
                         <a:rPr lang="pt-BR" i="1">
                           <a:latin typeface="Cambria Math" panose="02040503050406030204" pitchFamily="18" charset="0"/>
                         </a:rPr>
-                        <m:t> </m:t>
-                      </m:r>
-                      <m:r>
-                        <a:rPr lang="pt-BR" i="1">
-                          <a:latin typeface="Cambria Math" panose="02040503050406030204" pitchFamily="18" charset="0"/>
-                        </a:rPr>
-                        <m:t>=</m:t>
-                      </m:r>
-                      <m:r>
-                        <a:rPr lang="pt-BR" i="1">
-                          <a:latin typeface="Cambria Math" panose="02040503050406030204" pitchFamily="18" charset="0"/>
-                        </a:rPr>
-                        <m:t> </m:t>
+                        <m:t> = </m:t>
                       </m:r>
                       <m:r>
                         <a:rPr lang="pt-BR" i="1">
@@ -43499,13 +43697,13 @@
   <p:clrMapOvr>
     <a:masterClrMapping/>
   </p:clrMapOvr>
-  <mc:AlternateContent xmlns:mc="http://schemas.openxmlformats.org/markup-compatibility/2006">
-    <mc:Choice xmlns:p14="http://schemas.microsoft.com/office/powerpoint/2010/main" Requires="p14">
+  <mc:AlternateContent xmlns:mc="http://schemas.openxmlformats.org/markup-compatibility/2006" xmlns:p14="http://schemas.microsoft.com/office/powerpoint/2010/main">
+    <mc:Choice Requires="p14">
       <p:transition spd="med" p14:dur="700">
         <p:fade/>
       </p:transition>
     </mc:Choice>
-    <mc:Fallback>
+    <mc:Fallback xmlns="">
       <p:transition spd="med">
         <p:fade/>
       </p:transition>
@@ -43767,55 +43965,14 @@
                       <a:schemeClr val="tx1"/>
                     </a:solidFill>
                   </a:rPr>
-                  <a:t>Sabendo que :</a:t>
-                </a:r>
-              </a:p>
-              <a:p>
-                <a:pPr lvl="1" algn="l">
-                  <a:lnSpc>
-                    <a:spcPct val="150000"/>
-                  </a:lnSpc>
-                  <a:buChar char="❏"/>
-                </a:pPr>
-                <a:endParaRPr lang="pt-BR" dirty="0">
-                  <a:solidFill>
-                    <a:schemeClr val="tx1"/>
-                  </a:solidFill>
-                </a:endParaRPr>
-              </a:p>
-              <a:p>
-                <a:pPr marL="596900" lvl="1" indent="0" algn="l">
-                  <a:lnSpc>
-                    <a:spcPct val="150000"/>
-                  </a:lnSpc>
-                </a:pPr>
-                <a:endParaRPr lang="pt-BR" dirty="0">
-                  <a:solidFill>
-                    <a:schemeClr val="tx1"/>
-                  </a:solidFill>
-                </a:endParaRPr>
-              </a:p>
-              <a:p>
-                <a:pPr lvl="1" algn="l">
-                  <a:lnSpc>
-                    <a:spcPct val="150000"/>
-                  </a:lnSpc>
-                  <a:buChar char="❏"/>
-                </a:pPr>
-                <a:r>
-                  <a:rPr lang="pt-BR" dirty="0">
-                    <a:solidFill>
-                      <a:schemeClr val="tx1"/>
-                    </a:solidFill>
-                  </a:rPr>
-                  <a:t>E que a solução analítica do mínimos quadrados é </a:t>
+                  <a:t>Sabendo que a solução analítica do mínimos quadrados é </a:t>
                 </a:r>
                 <a14:m>
                   <m:oMath xmlns:m="http://schemas.openxmlformats.org/officeDocument/2006/math">
                     <m:sSup>
                       <m:sSupPr>
                         <m:ctrlPr>
-                          <a:rPr lang="pt-BR" i="1" dirty="0" smtClean="0">
+                          <a:rPr lang="pt-BR" i="1" dirty="0">
                             <a:solidFill>
                               <a:srgbClr val="980000"/>
                             </a:solidFill>
@@ -43828,7 +43985,7 @@
                           <m:rPr>
                             <m:sty m:val="p"/>
                           </m:rPr>
-                          <a:rPr lang="pt-BR" b="0" i="1" dirty="0" smtClean="0">
+                          <a:rPr lang="pt-BR" i="1" dirty="0">
                             <a:solidFill>
                               <a:srgbClr val="980000"/>
                             </a:solidFill>
@@ -43842,7 +43999,7 @@
                           <m:rPr>
                             <m:sty m:val="p"/>
                           </m:rPr>
-                          <a:rPr lang="pt-BR" b="0" i="1" dirty="0" smtClean="0">
+                          <a:rPr lang="pt-BR" i="1" dirty="0">
                             <a:solidFill>
                               <a:srgbClr val="980000"/>
                             </a:solidFill>
@@ -43853,7 +44010,7 @@
                       </m:sup>
                     </m:sSup>
                     <m:r>
-                      <a:rPr lang="pt-BR" i="1" dirty="0" smtClean="0">
+                      <a:rPr lang="pt-BR" i="1" dirty="0">
                         <a:solidFill>
                           <a:srgbClr val="980000"/>
                         </a:solidFill>
@@ -43862,7 +44019,7 @@
                       <m:t>𝐻</m:t>
                     </m:r>
                     <m:r>
-                      <a:rPr lang="pt-BR" i="1" dirty="0" smtClean="0">
+                      <a:rPr lang="pt-BR" i="1" dirty="0">
                         <a:solidFill>
                           <a:srgbClr val="980000"/>
                         </a:solidFill>
@@ -43911,19 +44068,95 @@
                       </m:sup>
                     </m:sSup>
                     <m:r>
-                      <a:rPr lang="pt-BR" i="1" dirty="0" smtClean="0">
+                      <a:rPr lang="pt-BR" i="1" dirty="0">
                         <a:solidFill>
                           <a:srgbClr val="980000"/>
                         </a:solidFill>
                         <a:latin typeface="Cambria Math" panose="02040503050406030204" pitchFamily="18" charset="0"/>
                       </a:rPr>
-                      <m:t>𝑦</m:t>
+                      <m:t> </m:t>
                     </m:r>
                   </m:oMath>
                 </a14:m>
+                <a:r>
+                  <a:rPr lang="pt-BR" dirty="0">
+                    <a:solidFill>
+                      <a:schemeClr val="tx1"/>
+                    </a:solidFill>
+                  </a:rPr>
+                  <a:t>:</a:t>
+                </a:r>
+              </a:p>
+              <a:p>
+                <a:pPr lvl="1" algn="l">
+                  <a:lnSpc>
+                    <a:spcPct val="150000"/>
+                  </a:lnSpc>
+                  <a:buChar char="❏"/>
+                </a:pPr>
+                <a:r>
+                  <a:rPr lang="pt-BR" dirty="0">
+                    <a:solidFill>
+                      <a:schemeClr val="tx1"/>
+                    </a:solidFill>
+                  </a:rPr>
+                  <a:t>Podemos enxergar as variáveis dessa maneira: </a:t>
+                </a:r>
                 <a:endParaRPr lang="pt-BR" dirty="0">
                   <a:solidFill>
                     <a:srgbClr val="980000"/>
+                  </a:solidFill>
+                </a:endParaRPr>
+              </a:p>
+              <a:p>
+                <a:pPr lvl="1" algn="l">
+                  <a:lnSpc>
+                    <a:spcPct val="150000"/>
+                  </a:lnSpc>
+                  <a:buChar char="❏"/>
+                </a:pPr>
+                <a:endParaRPr lang="pt-BR" dirty="0">
+                  <a:solidFill>
+                    <a:schemeClr val="tx1"/>
+                  </a:solidFill>
+                </a:endParaRPr>
+              </a:p>
+              <a:p>
+                <a:pPr lvl="1" algn="l">
+                  <a:lnSpc>
+                    <a:spcPct val="150000"/>
+                  </a:lnSpc>
+                  <a:buChar char="❏"/>
+                </a:pPr>
+                <a:endParaRPr lang="pt-BR" dirty="0">
+                  <a:solidFill>
+                    <a:schemeClr val="tx1"/>
+                  </a:solidFill>
+                </a:endParaRPr>
+              </a:p>
+              <a:p>
+                <a:pPr lvl="1" algn="l">
+                  <a:lnSpc>
+                    <a:spcPct val="150000"/>
+                  </a:lnSpc>
+                  <a:buChar char="❏"/>
+                </a:pPr>
+                <a:endParaRPr lang="pt-BR" dirty="0">
+                  <a:solidFill>
+                    <a:schemeClr val="tx1"/>
+                  </a:solidFill>
+                </a:endParaRPr>
+              </a:p>
+              <a:p>
+                <a:pPr lvl="1" algn="l">
+                  <a:lnSpc>
+                    <a:spcPct val="150000"/>
+                  </a:lnSpc>
+                  <a:buChar char="❏"/>
+                </a:pPr>
+                <a:endParaRPr lang="pt-BR" dirty="0">
+                  <a:solidFill>
+                    <a:schemeClr val="tx1"/>
                   </a:solidFill>
                 </a:endParaRPr>
               </a:p>
@@ -43940,7 +44173,7 @@
                       <a:schemeClr val="tx1"/>
                     </a:solidFill>
                   </a:rPr>
-                  <a:t>Temos a solução analítica</a:t>
+                  <a:t>Assim temos a solução analítica</a:t>
                 </a:r>
               </a:p>
               <a:p>
@@ -43955,7 +44188,7 @@
                       <m:accPr>
                         <m:chr m:val="̂"/>
                         <m:ctrlPr>
-                          <a:rPr lang="pt-BR" b="0" dirty="0" smtClean="0">
+                          <a:rPr lang="pt-BR" b="0" i="1" dirty="0" smtClean="0">
                             <a:solidFill>
                               <a:schemeClr val="tx1"/>
                             </a:solidFill>
@@ -44096,16 +44329,7 @@
                                 </a:solidFill>
                                 <a:latin typeface="Cambria Math" panose="02040503050406030204" pitchFamily="18" charset="0"/>
                               </a:rPr>
-                              <m:t>−</m:t>
-                            </m:r>
-                            <m:r>
-                              <a:rPr lang="pt-BR" i="1" dirty="0">
-                                <a:solidFill>
-                                  <a:schemeClr val="tx1"/>
-                                </a:solidFill>
-                                <a:latin typeface="Cambria Math" panose="02040503050406030204" pitchFamily="18" charset="0"/>
-                              </a:rPr>
-                              <m:t>1</m:t>
+                              <m:t>−1</m:t>
                             </m:r>
                           </m:sup>
                         </m:sSup>
@@ -44370,16 +44594,7 @@
                                 </a:solidFill>
                                 <a:latin typeface="Cambria Math" panose="02040503050406030204" pitchFamily="18" charset="0"/>
                               </a:rPr>
-                              <m:t>)</m:t>
-                            </m:r>
-                            <m:r>
-                              <a:rPr lang="pt-BR" b="0" i="1" dirty="0" smtClean="0">
-                                <a:solidFill>
-                                  <a:schemeClr val="tx1"/>
-                                </a:solidFill>
-                                <a:latin typeface="Cambria Math" panose="02040503050406030204" pitchFamily="18" charset="0"/>
-                              </a:rPr>
-                              <m:t>²</m:t>
+                              <m:t>)²</m:t>
                             </m:r>
                           </m:e>
                         </m:nary>
@@ -44863,8 +45078,8 @@
         </p:blipFill>
         <p:spPr>
           <a:xfrm>
-            <a:off x="3506324" y="1749781"/>
-            <a:ext cx="2131301" cy="731777"/>
+            <a:off x="3136346" y="2534909"/>
+            <a:ext cx="2871257" cy="985839"/>
           </a:xfrm>
           <a:prstGeom prst="rect">
             <a:avLst/>
@@ -44881,13 +45096,13 @@
   <p:clrMapOvr>
     <a:masterClrMapping/>
   </p:clrMapOvr>
-  <mc:AlternateContent xmlns:mc="http://schemas.openxmlformats.org/markup-compatibility/2006">
-    <mc:Choice xmlns:p14="http://schemas.microsoft.com/office/powerpoint/2010/main" Requires="p14">
+  <mc:AlternateContent xmlns:mc="http://schemas.openxmlformats.org/markup-compatibility/2006" xmlns:p14="http://schemas.microsoft.com/office/powerpoint/2010/main">
+    <mc:Choice Requires="p14">
       <p:transition spd="med" p14:dur="700">
         <p:fade/>
       </p:transition>
     </mc:Choice>
-    <mc:Fallback>
+    <mc:Fallback xmlns="">
       <p:transition spd="med">
         <p:fade/>
       </p:transition>
